--- a/bsp_project_presentation.pptx
+++ b/bsp_project_presentation.pptx
@@ -11875,7 +11875,7 @@
         </p:nvSpPr>
         <p:spPr>
           <a:xfrm>
-            <a:off x="4823077" y="1596757"/>
+            <a:off x="4823075" y="1566890"/>
             <a:ext cx="2543773" cy="769441"/>
           </a:xfrm>
           <a:prstGeom prst="rect">
@@ -11952,7 +11952,7 @@
         </p:nvCxnSpPr>
         <p:spPr>
           <a:xfrm>
-            <a:off x="2078566" y="2619022"/>
+            <a:off x="2117289" y="2570254"/>
             <a:ext cx="7902222" cy="0"/>
           </a:xfrm>
           <a:prstGeom prst="line">
@@ -11993,8 +11993,8 @@
         </p:nvSpPr>
         <p:spPr>
           <a:xfrm>
-            <a:off x="1712194" y="2882813"/>
-            <a:ext cx="9183924" cy="369332"/>
+            <a:off x="2092905" y="2871847"/>
+            <a:ext cx="8004114" cy="369332"/>
           </a:xfrm>
           <a:prstGeom prst="rect">
             <a:avLst/>
@@ -12032,7 +12032,61 @@
                 </a:solidFill>
                 <a:latin typeface="Lucida Bright" panose="02040602050505020304" pitchFamily="18" charset="77"/>
               </a:rPr>
-              <a:t>/VariationalEncoderForHeartBeatClassification</a:t>
+              <a:t>/</a:t>
+            </a:r>
+            <a:r>
+              <a:rPr lang="it-IT" dirty="0" err="1">
+                <a:solidFill>
+                  <a:srgbClr val="7FB8E9"/>
+                </a:solidFill>
+                <a:latin typeface="Lucida Bright" panose="02040602050505020304" pitchFamily="18" charset="77"/>
+              </a:rPr>
+              <a:t>accelerometer</a:t>
+            </a:r>
+            <a:r>
+              <a:rPr lang="it-IT" dirty="0">
+                <a:solidFill>
+                  <a:srgbClr val="7FB8E9"/>
+                </a:solidFill>
+                <a:latin typeface="Lucida Bright" panose="02040602050505020304" pitchFamily="18" charset="77"/>
+              </a:rPr>
+              <a:t>-based-</a:t>
+            </a:r>
+            <a:r>
+              <a:rPr lang="it-IT" dirty="0" err="1">
+                <a:solidFill>
+                  <a:srgbClr val="7FB8E9"/>
+                </a:solidFill>
+                <a:latin typeface="Lucida Bright" panose="02040602050505020304" pitchFamily="18" charset="77"/>
+              </a:rPr>
+              <a:t>rr</a:t>
+            </a:r>
+            <a:r>
+              <a:rPr lang="it-IT" dirty="0">
+                <a:solidFill>
+                  <a:srgbClr val="7FB8E9"/>
+                </a:solidFill>
+                <a:latin typeface="Lucida Bright" panose="02040602050505020304" pitchFamily="18" charset="77"/>
+              </a:rPr>
+              <a:t>-</a:t>
+            </a:r>
+            <a:r>
+              <a:rPr lang="it-IT" dirty="0" err="1">
+                <a:solidFill>
+                  <a:srgbClr val="7FB8E9"/>
+                </a:solidFill>
+                <a:latin typeface="Lucida Bright" panose="02040602050505020304" pitchFamily="18" charset="77"/>
+              </a:rPr>
+              <a:t>hr</a:t>
+            </a:r>
+            <a:r>
+              <a:rPr lang="it-IT" dirty="0">
+                <a:solidFill>
+                  <a:srgbClr val="7FB8E9"/>
+                </a:solidFill>
+                <a:latin typeface="Lucida Bright" panose="02040602050505020304" pitchFamily="18" charset="77"/>
+              </a:rPr>
+              <a:t>-estimate</a:t>
             </a:r>
           </a:p>
         </p:txBody>
@@ -14774,7 +14828,7 @@
         <p:spPr>
           <a:xfrm>
             <a:off x="9801620" y="5046346"/>
-            <a:ext cx="2534720" cy="1169551"/>
+            <a:ext cx="2390380" cy="954107"/>
           </a:xfrm>
           <a:prstGeom prst="rect">
             <a:avLst/>
@@ -14791,29 +14845,51 @@
               <a:rPr lang="it-IT" sz="1400" dirty="0">
                 <a:latin typeface="Lucida Bright" panose="02040602050505020304" pitchFamily="18" charset="77"/>
               </a:rPr>
-              <a:t>Fixed 60s window</a:t>
-            </a:r>
-          </a:p>
-          <a:p>
+              <a:t>Subtract the mean, divide by standard </a:t>
+            </a:r>
+            <a:r>
+              <a:rPr lang="it-IT" sz="1400" dirty="0" err="1">
+                <a:latin typeface="Lucida Bright" panose="02040602050505020304" pitchFamily="18" charset="77"/>
+              </a:rPr>
+              <a:t>deviation</a:t>
+            </a:r>
             <a:r>
               <a:rPr lang="it-IT" sz="1400" dirty="0">
                 <a:latin typeface="Lucida Bright" panose="02040602050505020304" pitchFamily="18" charset="77"/>
               </a:rPr>
-              <a:t>Central segment of the recording</a:t>
-            </a:r>
-          </a:p>
-          <a:p>
+              <a:t> </a:t>
+            </a:r>
+          </a:p>
+          <a:p>
+            <a:r>
+              <a:rPr lang="it-IT" sz="1400" dirty="0">
+                <a:latin typeface="Lucida Bright" panose="02040602050505020304" pitchFamily="18" charset="77"/>
+              </a:rPr>
+              <a:t>Puts </a:t>
+            </a:r>
             <a:r>
               <a:rPr lang="it-IT" sz="1400" dirty="0" err="1">
                 <a:latin typeface="Lucida Bright" panose="02040602050505020304" pitchFamily="18" charset="77"/>
               </a:rPr>
-              <a:t>Removes</a:t>
+              <a:t>axes</a:t>
             </a:r>
             <a:r>
               <a:rPr lang="it-IT" sz="1400" dirty="0">
                 <a:latin typeface="Lucida Bright" panose="02040602050505020304" pitchFamily="18" charset="77"/>
               </a:rPr>
-              <a:t> start/end artifacts </a:t>
+              <a:t> on the </a:t>
+            </a:r>
+            <a:r>
+              <a:rPr lang="it-IT" sz="1400" dirty="0" err="1">
+                <a:latin typeface="Lucida Bright" panose="02040602050505020304" pitchFamily="18" charset="77"/>
+              </a:rPr>
+              <a:t>same</a:t>
+            </a:r>
+            <a:r>
+              <a:rPr lang="it-IT" sz="1400" dirty="0">
+                <a:latin typeface="Lucida Bright" panose="02040602050505020304" pitchFamily="18" charset="77"/>
+              </a:rPr>
+              <a:t> scale </a:t>
             </a:r>
           </a:p>
         </p:txBody>
@@ -16491,36 +16567,6 @@
       </p:pic>
       <p:pic>
         <p:nvPicPr>
-          <p:cNvPr id="51" name="Immagine 50" descr="Immagine che contiene testo, Diagramma, linea, diagramma&#10;&#10;Il contenuto generato dall'IA potrebbe non essere corretto.">
-            <a:extLst>
-              <a:ext uri="{FF2B5EF4-FFF2-40B4-BE49-F238E27FC236}">
-                <a16:creationId xmlns:a16="http://schemas.microsoft.com/office/drawing/2014/main" id="{C4F18BAF-FE4C-C79D-AA1E-532F3412E3E9}"/>
-              </a:ext>
-            </a:extLst>
-          </p:cNvPr>
-          <p:cNvPicPr>
-            <a:picLocks noChangeAspect="1"/>
-          </p:cNvPicPr>
-          <p:nvPr/>
-        </p:nvPicPr>
-        <p:blipFill>
-          <a:blip r:embed="rId8"/>
-          <a:stretch>
-            <a:fillRect/>
-          </a:stretch>
-        </p:blipFill>
-        <p:spPr>
-          <a:xfrm>
-            <a:off x="-1647845" y="7101461"/>
-            <a:ext cx="3987521" cy="2639427"/>
-          </a:xfrm>
-          <a:prstGeom prst="rect">
-            <a:avLst/>
-          </a:prstGeom>
-        </p:spPr>
-      </p:pic>
-      <p:pic>
-        <p:nvPicPr>
           <p:cNvPr id="52" name="Elemento grafico 51">
             <a:extLst>
               <a:ext uri="{FF2B5EF4-FFF2-40B4-BE49-F238E27FC236}">
@@ -16549,36 +16595,6 @@
           <a:xfrm rot="3421386">
             <a:off x="2342558" y="6675689"/>
             <a:ext cx="204003" cy="204003"/>
-          </a:xfrm>
-          <a:prstGeom prst="rect">
-            <a:avLst/>
-          </a:prstGeom>
-        </p:spPr>
-      </p:pic>
-      <p:pic>
-        <p:nvPicPr>
-          <p:cNvPr id="53" name="Immagine 52" descr="Immagine che contiene testo, Diagramma, linea, diagramma&#10;&#10;Il contenuto generato dall'IA potrebbe non essere corretto.">
-            <a:extLst>
-              <a:ext uri="{FF2B5EF4-FFF2-40B4-BE49-F238E27FC236}">
-                <a16:creationId xmlns:a16="http://schemas.microsoft.com/office/drawing/2014/main" id="{733CBF53-DE06-ED4F-1062-D4ED91B6004F}"/>
-              </a:ext>
-            </a:extLst>
-          </p:cNvPr>
-          <p:cNvPicPr>
-            <a:picLocks noChangeAspect="1"/>
-          </p:cNvPicPr>
-          <p:nvPr/>
-        </p:nvPicPr>
-        <p:blipFill>
-          <a:blip r:embed="rId9"/>
-          <a:stretch>
-            <a:fillRect/>
-          </a:stretch>
-        </p:blipFill>
-        <p:spPr>
-          <a:xfrm>
-            <a:off x="2419704" y="7128417"/>
-            <a:ext cx="3906452" cy="2632609"/>
           </a:xfrm>
           <a:prstGeom prst="rect">
             <a:avLst/>

--- a/bsp_project_presentation.pptx
+++ b/bsp_project_presentation.pptx
@@ -5551,7 +5551,7 @@
                 </a:solidFill>
                 <a:latin typeface="Lucida Bright" panose="02040602050505020304" pitchFamily="18" charset="77"/>
               </a:rPr>
-              <a:t>/23</a:t>
+              <a:t>/13</a:t>
             </a:r>
           </a:p>
         </p:txBody>
@@ -7058,7 +7058,7 @@
                 </a:solidFill>
                 <a:latin typeface="Lucida Bright" panose="02040602050505020304" pitchFamily="18" charset="77"/>
               </a:rPr>
-              <a:t>/23</a:t>
+              <a:t>/13</a:t>
             </a:r>
           </a:p>
         </p:txBody>
@@ -8439,7 +8439,24 @@
                 <a:latin typeface="Lucida Bright" panose="02040602050505020304" pitchFamily="18" charset="77"/>
                 <a:sym typeface="Wingdings" pitchFamily="2" charset="2"/>
               </a:rPr>
-              <a:t>  HR </a:t>
+              <a:t>  </a:t>
+            </a:r>
+            <a:r>
+              <a:rPr lang="it-IT" sz="1200" dirty="0">
+                <a:solidFill>
+                  <a:schemeClr val="accent4"/>
+                </a:solidFill>
+                <a:latin typeface="Lucida Bright" panose="02040602050505020304" pitchFamily="18" charset="77"/>
+                <a:sym typeface="Wingdings" pitchFamily="2" charset="2"/>
+              </a:rPr>
+              <a:t>HR</a:t>
+            </a:r>
+            <a:r>
+              <a:rPr lang="it-IT" sz="1200" dirty="0">
+                <a:latin typeface="Lucida Bright" panose="02040602050505020304" pitchFamily="18" charset="77"/>
+                <a:sym typeface="Wingdings" pitchFamily="2" charset="2"/>
+              </a:rPr>
+              <a:t> </a:t>
             </a:r>
             <a:endParaRPr lang="it-IT" sz="1200" dirty="0">
               <a:latin typeface="Lucida Bright" panose="02040602050505020304" pitchFamily="18" charset="77"/>
@@ -8637,7 +8654,7 @@
                 </a:solidFill>
                 <a:latin typeface="Lucida Bright" panose="02040602050505020304" pitchFamily="18" charset="77"/>
               </a:rPr>
-              <a:t>/23</a:t>
+              <a:t>/13</a:t>
             </a:r>
           </a:p>
         </p:txBody>
@@ -9564,7 +9581,7 @@
                 </a:solidFill>
                 <a:latin typeface="Lucida Bright" panose="02040602050505020304" pitchFamily="18" charset="77"/>
               </a:rPr>
-              <a:t>/23</a:t>
+              <a:t>/13</a:t>
             </a:r>
           </a:p>
         </p:txBody>
@@ -10690,61 +10707,21 @@
                 <a:latin typeface="Lucida Bright" panose="02040602050505020304" pitchFamily="18" charset="77"/>
                 <a:sym typeface="Wingdings" pitchFamily="2" charset="2"/>
               </a:rPr>
-              <a:t>  </a:t>
+              <a:t>  Build template  Compute cross-</a:t>
+            </a:r>
+            <a:r>
+              <a:rPr lang="it-IT" sz="1200" dirty="0" err="1">
+                <a:latin typeface="Lucida Bright" panose="02040602050505020304" pitchFamily="18" charset="77"/>
+                <a:sym typeface="Wingdings" pitchFamily="2" charset="2"/>
+              </a:rPr>
+              <a:t>correlation</a:t>
             </a:r>
             <a:r>
               <a:rPr lang="it-IT" sz="1200" dirty="0">
-                <a:solidFill>
-                  <a:schemeClr val="accent4"/>
-                </a:solidFill>
                 <a:latin typeface="Lucida Bright" panose="02040602050505020304" pitchFamily="18" charset="77"/>
                 <a:sym typeface="Wingdings" pitchFamily="2" charset="2"/>
               </a:rPr>
-              <a:t>Build template </a:t>
-            </a:r>
-            <a:r>
-              <a:rPr lang="it-IT" sz="1200" dirty="0">
-                <a:latin typeface="Lucida Bright" panose="02040602050505020304" pitchFamily="18" charset="77"/>
-                <a:sym typeface="Wingdings" pitchFamily="2" charset="2"/>
-              </a:rPr>
-              <a:t> </a:t>
-            </a:r>
-            <a:r>
-              <a:rPr lang="it-IT" sz="1200" dirty="0">
-                <a:solidFill>
-                  <a:schemeClr val="accent4"/>
-                </a:solidFill>
-                <a:latin typeface="Lucida Bright" panose="02040602050505020304" pitchFamily="18" charset="77"/>
-                <a:sym typeface="Wingdings" pitchFamily="2" charset="2"/>
-              </a:rPr>
-              <a:t>Compute cross-</a:t>
-            </a:r>
-            <a:r>
-              <a:rPr lang="it-IT" sz="1200" dirty="0" err="1">
-                <a:solidFill>
-                  <a:schemeClr val="accent4"/>
-                </a:solidFill>
-                <a:latin typeface="Lucida Bright" panose="02040602050505020304" pitchFamily="18" charset="77"/>
-                <a:sym typeface="Wingdings" pitchFamily="2" charset="2"/>
-              </a:rPr>
-              <a:t>correlation</a:t>
-            </a:r>
-            <a:r>
-              <a:rPr lang="it-IT" sz="1200" dirty="0">
-                <a:solidFill>
-                  <a:schemeClr val="accent4"/>
-                </a:solidFill>
-                <a:latin typeface="Lucida Bright" panose="02040602050505020304" pitchFamily="18" charset="77"/>
-                <a:sym typeface="Wingdings" pitchFamily="2" charset="2"/>
-              </a:rPr>
-              <a:t> </a:t>
-            </a:r>
-            <a:r>
-              <a:rPr lang="it-IT" sz="1200" dirty="0">
-                <a:latin typeface="Lucida Bright" panose="02040602050505020304" pitchFamily="18" charset="77"/>
-                <a:sym typeface="Wingdings" pitchFamily="2" charset="2"/>
-              </a:rPr>
-              <a:t> HR </a:t>
+              <a:t>  HR </a:t>
             </a:r>
             <a:endParaRPr lang="it-IT" sz="1200" dirty="0">
               <a:latin typeface="Lucida Bright" panose="02040602050505020304" pitchFamily="18" charset="77"/>
@@ -10980,7 +10957,7 @@
                 </a:solidFill>
                 <a:latin typeface="Lucida Bright" panose="02040602050505020304" pitchFamily="18" charset="77"/>
               </a:rPr>
-              <a:t>/23</a:t>
+              <a:t>/13</a:t>
             </a:r>
           </a:p>
         </p:txBody>
@@ -12263,7 +12240,7 @@
                 </a:solidFill>
                 <a:latin typeface="Lucida Bright" panose="02040602050505020304" pitchFamily="18" charset="77"/>
               </a:rPr>
-              <a:t>/23</a:t>
+              <a:t>/13</a:t>
             </a:r>
           </a:p>
         </p:txBody>
@@ -13878,7 +13855,7 @@
                 </a:solidFill>
                 <a:latin typeface="Lucida Bright" panose="02040602050505020304" pitchFamily="18" charset="77"/>
               </a:rPr>
-              <a:t>/23</a:t>
+              <a:t>/13</a:t>
             </a:r>
           </a:p>
         </p:txBody>
@@ -15690,7 +15667,7 @@
                 </a:solidFill>
                 <a:latin typeface="Lucida Bright" panose="02040602050505020304" pitchFamily="18" charset="77"/>
               </a:rPr>
-              <a:t>/23</a:t>
+              <a:t>/13</a:t>
             </a:r>
           </a:p>
         </p:txBody>
@@ -17352,7 +17329,7 @@
                 </a:solidFill>
                 <a:latin typeface="Lucida Bright" panose="02040602050505020304" pitchFamily="18" charset="77"/>
               </a:rPr>
-              <a:t>/23</a:t>
+              <a:t>/13</a:t>
             </a:r>
           </a:p>
         </p:txBody>
@@ -19235,7 +19212,7 @@
                 </a:solidFill>
                 <a:latin typeface="Lucida Bright" panose="02040602050505020304" pitchFamily="18" charset="77"/>
               </a:rPr>
-              <a:t>/23</a:t>
+              <a:t>/13</a:t>
             </a:r>
           </a:p>
         </p:txBody>
@@ -20928,7 +20905,7 @@
                 </a:solidFill>
                 <a:latin typeface="Lucida Bright" panose="02040602050505020304" pitchFamily="18" charset="77"/>
               </a:rPr>
-              <a:t>/23</a:t>
+              <a:t>/13</a:t>
             </a:r>
           </a:p>
         </p:txBody>
@@ -22670,7 +22647,7 @@
                 </a:solidFill>
                 <a:latin typeface="Lucida Bright" panose="02040602050505020304" pitchFamily="18" charset="77"/>
               </a:rPr>
-              <a:t>/23</a:t>
+              <a:t>/13</a:t>
             </a:r>
           </a:p>
         </p:txBody>
@@ -23493,7 +23470,7 @@
                 </a:solidFill>
                 <a:latin typeface="Lucida Bright" panose="02040602050505020304" pitchFamily="18" charset="77"/>
               </a:rPr>
-              <a:t>/23</a:t>
+              <a:t>/13</a:t>
             </a:r>
           </a:p>
         </p:txBody>
